--- a/presentations/new_equations_toydata4.pptx
+++ b/presentations/new_equations_toydata4.pptx
@@ -563,7 +563,7 @@
           <a:p>
             <a:fld id="{E34DA384-6147-40AB-A8ED-48B4263735E0}" type="datetimeFigureOut">
               <a:rPr lang="en-US" smtClean="0"/>
-              <a:t>10/21/2025</a:t>
+              <a:t>10/22/2025</a:t>
             </a:fld>
             <a:endParaRPr lang="en-US"/>
           </a:p>
@@ -761,7 +761,7 @@
           <a:p>
             <a:fld id="{E34DA384-6147-40AB-A8ED-48B4263735E0}" type="datetimeFigureOut">
               <a:rPr lang="en-US" smtClean="0"/>
-              <a:t>10/21/2025</a:t>
+              <a:t>10/22/2025</a:t>
             </a:fld>
             <a:endParaRPr lang="en-US"/>
           </a:p>
@@ -969,7 +969,7 @@
           <a:p>
             <a:fld id="{E34DA384-6147-40AB-A8ED-48B4263735E0}" type="datetimeFigureOut">
               <a:rPr lang="en-US" smtClean="0"/>
-              <a:t>10/21/2025</a:t>
+              <a:t>10/22/2025</a:t>
             </a:fld>
             <a:endParaRPr lang="en-US"/>
           </a:p>
@@ -1167,7 +1167,7 @@
           <a:p>
             <a:fld id="{E34DA384-6147-40AB-A8ED-48B4263735E0}" type="datetimeFigureOut">
               <a:rPr lang="en-US" smtClean="0"/>
-              <a:t>10/21/2025</a:t>
+              <a:t>10/22/2025</a:t>
             </a:fld>
             <a:endParaRPr lang="en-US"/>
           </a:p>
@@ -1442,7 +1442,7 @@
           <a:p>
             <a:fld id="{E34DA384-6147-40AB-A8ED-48B4263735E0}" type="datetimeFigureOut">
               <a:rPr lang="en-US" smtClean="0"/>
-              <a:t>10/21/2025</a:t>
+              <a:t>10/22/2025</a:t>
             </a:fld>
             <a:endParaRPr lang="en-US"/>
           </a:p>
@@ -1707,7 +1707,7 @@
           <a:p>
             <a:fld id="{E34DA384-6147-40AB-A8ED-48B4263735E0}" type="datetimeFigureOut">
               <a:rPr lang="en-US" smtClean="0"/>
-              <a:t>10/21/2025</a:t>
+              <a:t>10/22/2025</a:t>
             </a:fld>
             <a:endParaRPr lang="en-US"/>
           </a:p>
@@ -2119,7 +2119,7 @@
           <a:p>
             <a:fld id="{E34DA384-6147-40AB-A8ED-48B4263735E0}" type="datetimeFigureOut">
               <a:rPr lang="en-US" smtClean="0"/>
-              <a:t>10/21/2025</a:t>
+              <a:t>10/22/2025</a:t>
             </a:fld>
             <a:endParaRPr lang="en-US"/>
           </a:p>
@@ -2260,7 +2260,7 @@
           <a:p>
             <a:fld id="{E34DA384-6147-40AB-A8ED-48B4263735E0}" type="datetimeFigureOut">
               <a:rPr lang="en-US" smtClean="0"/>
-              <a:t>10/21/2025</a:t>
+              <a:t>10/22/2025</a:t>
             </a:fld>
             <a:endParaRPr lang="en-US"/>
           </a:p>
@@ -2373,7 +2373,7 @@
           <a:p>
             <a:fld id="{E34DA384-6147-40AB-A8ED-48B4263735E0}" type="datetimeFigureOut">
               <a:rPr lang="en-US" smtClean="0"/>
-              <a:t>10/21/2025</a:t>
+              <a:t>10/22/2025</a:t>
             </a:fld>
             <a:endParaRPr lang="en-US"/>
           </a:p>
@@ -2684,7 +2684,7 @@
           <a:p>
             <a:fld id="{E34DA384-6147-40AB-A8ED-48B4263735E0}" type="datetimeFigureOut">
               <a:rPr lang="en-US" smtClean="0"/>
-              <a:t>10/21/2025</a:t>
+              <a:t>10/22/2025</a:t>
             </a:fld>
             <a:endParaRPr lang="en-US"/>
           </a:p>
@@ -2972,7 +2972,7 @@
           <a:p>
             <a:fld id="{E34DA384-6147-40AB-A8ED-48B4263735E0}" type="datetimeFigureOut">
               <a:rPr lang="en-US" smtClean="0"/>
-              <a:t>10/21/2025</a:t>
+              <a:t>10/22/2025</a:t>
             </a:fld>
             <a:endParaRPr lang="en-US"/>
           </a:p>
@@ -3213,7 +3213,7 @@
           <a:p>
             <a:fld id="{E34DA384-6147-40AB-A8ED-48B4263735E0}" type="datetimeFigureOut">
               <a:rPr lang="en-US" smtClean="0"/>
-              <a:t>10/21/2025</a:t>
+              <a:t>10/22/2025</a:t>
             </a:fld>
             <a:endParaRPr lang="en-US"/>
           </a:p>
